--- a/abbildungen/kap3/Gesamtmodellueberblick_fuer_die_integrierte_Unternehmensplanung_und_-steuerung.pptx
+++ b/abbildungen/kap3/Gesamtmodellueberblick_fuer_die_integrierte_Unternehmensplanung_und_-steuerung.pptx
@@ -3096,7 +3096,7 @@
         </p:nvSpPr>
         <p:spPr>
           <a:xfrm>
-            <a:off x="10800" y="216000"/>
+            <a:off x="10800" y="10800"/>
             <a:ext cx="828000" cy="576000"/>
           </a:xfrm>
           <a:prstGeom prst="roundRect">
@@ -3221,11 +3221,11 @@
         <p:spPr>
           <a:xfrm>
             <a:off x="10800" y="1008000"/>
-            <a:ext cx="828000" cy="792000"/>
+            <a:ext cx="828000" cy="931644"/>
           </a:xfrm>
           <a:prstGeom prst="roundRect">
             <a:avLst>
-              <a:gd name="adj" fmla="val 3636"/>
+              <a:gd name="adj" fmla="val 3478"/>
             </a:avLst>
           </a:prstGeom>
           <a:solidFill>
@@ -3466,8 +3466,8 @@
         </p:nvSpPr>
         <p:spPr>
           <a:xfrm>
-            <a:off x="424800" y="792000"/>
-            <a:ext cx="0" cy="216000"/>
+            <a:off x="424800" y="586800"/>
+            <a:ext cx="0" cy="421200"/>
           </a:xfrm>
           <a:custGeom>
             <a:avLst/>
@@ -3476,12 +3476,12 @@
             <a:cxnLst/>
             <a:rect l="l" t="t" r="r" b="b"/>
             <a:pathLst>
-              <a:path w="0" h="216000">
+              <a:path w="0" h="421200">
                 <a:moveTo>
                   <a:pt x="0" y="0"/>
                 </a:moveTo>
                 <a:lnTo>
-                  <a:pt x="0" y="216000"/>
+                  <a:pt x="0" y="421200"/>
                 </a:lnTo>
               </a:path>
             </a:pathLst>
@@ -3512,8 +3512,8 @@
         </p:nvSpPr>
         <p:spPr>
           <a:xfrm>
-            <a:off x="424800" y="1800000"/>
-            <a:ext cx="0" cy="504000"/>
+            <a:off x="424800" y="1939644"/>
+            <a:ext cx="0" cy="364356"/>
           </a:xfrm>
           <a:custGeom>
             <a:avLst/>
@@ -3522,12 +3522,12 @@
             <a:cxnLst/>
             <a:rect l="l" t="t" r="r" b="b"/>
             <a:pathLst>
-              <a:path w="0" h="504000">
+              <a:path w="0" h="364356">
                 <a:moveTo>
                   <a:pt x="0" y="0"/>
                 </a:moveTo>
                 <a:lnTo>
-                  <a:pt x="0" y="504000"/>
+                  <a:pt x="0" y="364356"/>
                 </a:lnTo>
               </a:path>
             </a:pathLst>
@@ -4587,11 +4587,11 @@
         <p:spPr>
           <a:xfrm>
             <a:off x="936000" y="1008000"/>
-            <a:ext cx="1116000" cy="792000"/>
+            <a:ext cx="1116000" cy="931644"/>
           </a:xfrm>
           <a:prstGeom prst="roundRect">
             <a:avLst>
-              <a:gd name="adj" fmla="val 3636"/>
+              <a:gd name="adj" fmla="val 3091"/>
             </a:avLst>
           </a:prstGeom>
           <a:solidFill>
@@ -4628,7 +4628,7 @@
             </a:avLst>
           </a:prstGeom>
           <a:solidFill>
-            <a:srgbClr val="3A3F44"/>
+            <a:srgbClr val="C62828"/>
           </a:solidFill>
           <a:ln>
             <a:noFill/>
@@ -4667,7 +4667,7 @@
         <p:spPr>
           <a:xfrm>
             <a:off x="936000" y="1188000"/>
-            <a:ext cx="1116000" cy="612000"/>
+            <a:ext cx="1116000" cy="751644"/>
           </a:xfrm>
           <a:prstGeom prst="rect">
             <a:avLst/>
@@ -4679,13 +4679,30 @@
             <a:noAutofit/>
           </a:bodyPr>
           <a:lstStyle/>
+          <a:p>
+            <a:pPr algn="l">
+              <a:lnSpc>
+                <a:spcPts val="767"/>
+              </a:lnSpc>
+              <a:buNone/>
+            </a:pPr>
+            <a:r>
+              <a:rPr lang="de-DE" sz="650" b="0" i="0">
+                <a:solidFill>
+                  <a:srgbClr val="1A1A1A"/>
+                </a:solidFill>
+                <a:latin typeface="Arial"/>
+              </a:rPr>
+              <a:t>Strategische Projekte mit</a:t>
+            </a:r>
+          </a:p>
           <a:p>
             <a:pPr algn="l" marL="79200" indent="-79200">
               <a:lnSpc>
                 <a:spcPts val="767"/>
               </a:lnSpc>
               <a:buFont typeface="Arial"/>
-              <a:buChar char="•"/>
+              <a:buChar char="–"/>
             </a:pPr>
             <a:r>
               <a:rPr lang="de-DE" sz="650" b="0" i="0">
@@ -4694,25 +4711,7 @@
                 </a:solidFill>
                 <a:latin typeface="Arial"/>
               </a:rPr>
-              <a:t>Strategische Projekte</a:t>
-            </a:r>
-            <a:br>
-              <a:rPr lang="de-DE" sz="650" b="0" i="0">
-                <a:solidFill>
-                  <a:srgbClr val="1A1A1A"/>
-                </a:solidFill>
-                <a:latin typeface="Arial"/>
-                <a:cs typeface="Arial"/>
-              </a:rPr>
-            </a:br>
-            <a:r>
-              <a:rPr lang="de-DE" sz="650" b="0" i="0">
-                <a:solidFill>
-                  <a:srgbClr val="1A1A1A"/>
-                </a:solidFill>
-                <a:latin typeface="Arial"/>
-              </a:rPr>
-              <a:t>mit Status</a:t>
+              <a:t>Status</a:t>
             </a:r>
           </a:p>
           <a:p>
@@ -4721,7 +4720,7 @@
                 <a:spcPts val="767"/>
               </a:lnSpc>
               <a:buFont typeface="Arial"/>
-              <a:buChar char="•"/>
+              <a:buChar char="–"/>
             </a:pPr>
             <a:r>
               <a:rPr lang="de-DE" sz="650" b="0" i="0">
@@ -4730,43 +4729,25 @@
                 </a:solidFill>
                 <a:latin typeface="Arial"/>
               </a:rPr>
-              <a:t>Zeitplan: Planung,</a:t>
-            </a:r>
-            <a:br>
+              <a:t>Zeitplan</a:t>
+            </a:r>
+          </a:p>
+          <a:p>
+            <a:pPr algn="l" marL="79200" indent="-79200">
+              <a:lnSpc>
+                <a:spcPts val="767"/>
+              </a:lnSpc>
+              <a:buFont typeface="Arial"/>
+              <a:buChar char="–"/>
+            </a:pPr>
+            <a:r>
               <a:rPr lang="de-DE" sz="650" b="0" i="0">
                 <a:solidFill>
                   <a:srgbClr val="1A1A1A"/>
                 </a:solidFill>
                 <a:latin typeface="Arial"/>
-                <a:cs typeface="Arial"/>
-              </a:rPr>
-            </a:br>
-            <a:r>
-              <a:rPr lang="de-DE" sz="650" b="0" i="0">
-                <a:solidFill>
-                  <a:srgbClr val="1A1A1A"/>
-                </a:solidFill>
-                <a:latin typeface="Arial"/>
-              </a:rPr>
-              <a:t>Umsetzung,</a:t>
-            </a:r>
-            <a:br>
-              <a:rPr lang="de-DE" sz="650" b="0" i="0">
-                <a:solidFill>
-                  <a:srgbClr val="1A1A1A"/>
-                </a:solidFill>
-                <a:latin typeface="Arial"/>
-                <a:cs typeface="Arial"/>
-              </a:rPr>
-            </a:br>
-            <a:r>
-              <a:rPr lang="de-DE" sz="650" b="0" i="0">
-                <a:solidFill>
-                  <a:srgbClr val="1A1A1A"/>
-                </a:solidFill>
-                <a:latin typeface="Arial"/>
-              </a:rPr>
-              <a:t>Durchführung</a:t>
+              </a:rPr>
+              <a:t>Kennzahlen</a:t>
             </a:r>
           </a:p>
         </p:txBody>
@@ -4779,7 +4760,7 @@
         </p:nvSpPr>
         <p:spPr>
           <a:xfrm>
-            <a:off x="4302000" y="21600"/>
+            <a:off x="4302000" y="324000"/>
             <a:ext cx="1267200" cy="216000"/>
           </a:xfrm>
           <a:prstGeom prst="roundRect">
@@ -4829,12 +4810,12 @@
         </p:nvSpPr>
         <p:spPr>
           <a:xfrm>
-            <a:off x="4302000" y="558000"/>
-            <a:ext cx="1267200" cy="1278000"/>
+            <a:off x="4302000" y="1008000"/>
+            <a:ext cx="1267200" cy="931644"/>
           </a:xfrm>
           <a:prstGeom prst="roundRect">
             <a:avLst>
-              <a:gd name="adj" fmla="val 2273"/>
+              <a:gd name="adj" fmla="val 3091"/>
             </a:avLst>
           </a:prstGeom>
           <a:solidFill>
@@ -4861,7 +4842,7 @@
         </p:nvSpPr>
         <p:spPr>
           <a:xfrm>
-            <a:off x="4302000" y="558000"/>
+            <a:off x="4302000" y="1008000"/>
             <a:ext cx="1267200" cy="260790"/>
           </a:xfrm>
           <a:prstGeom prst="round2SameRect">
@@ -4927,8 +4908,8 @@
         </p:nvSpPr>
         <p:spPr>
           <a:xfrm>
-            <a:off x="4302000" y="818790"/>
-            <a:ext cx="1267200" cy="1017210"/>
+            <a:off x="4302000" y="1268790"/>
+            <a:ext cx="1267200" cy="670854"/>
           </a:xfrm>
           <a:prstGeom prst="rect">
             <a:avLst/>
@@ -4948,52 +4929,13 @@
               <a:buNone/>
             </a:pPr>
             <a:r>
-              <a:rPr lang="de-DE" sz="650" b="1" i="0">
+              <a:rPr lang="de-DE" sz="650" b="0" i="0">
                 <a:solidFill>
                   <a:srgbClr val="1A1A1A"/>
                 </a:solidFill>
                 <a:latin typeface="Arial"/>
               </a:rPr>
-              <a:t>Internes Reporting</a:t>
-            </a:r>
-            <a:br>
-              <a:rPr lang="de-DE" sz="650" b="1" i="0">
-                <a:solidFill>
-                  <a:srgbClr val="1A1A1A"/>
-                </a:solidFill>
-                <a:latin typeface="Arial"/>
-                <a:cs typeface="Arial"/>
-              </a:rPr>
-            </a:br>
-            <a:r>
-              <a:rPr lang="de-DE" sz="650" b="1" i="0">
-                <a:solidFill>
-                  <a:srgbClr val="1A1A1A"/>
-                </a:solidFill>
-                <a:latin typeface="Arial"/>
-              </a:rPr>
-              <a:t>(Kennzahlen und Berichte)</a:t>
-            </a:r>
-          </a:p>
-          <a:p>
-            <a:pPr algn="l" marL="79200" indent="-79200">
-              <a:lnSpc>
-                <a:spcPts val="767"/>
-              </a:lnSpc>
-              <a:spcBef>
-                <a:spcPts val="200"/>
-              </a:spcBef>
-              <a:buFont typeface="Arial"/>
-              <a:buChar char="•"/>
-            </a:pPr>
-            <a:r>
-              <a:rPr lang="de-DE" sz="650" b="0" i="0">
-                <a:solidFill>
-                  <a:srgbClr val="1A1A1A"/>
-                </a:solidFill>
-                <a:latin typeface="Arial"/>
-              </a:rPr>
-              <a:t>Strategische Ziele und</a:t>
+              <a:t>Strategischem Ziel je</a:t>
             </a:r>
             <a:br>
               <a:rPr lang="de-DE" sz="650" b="0" i="0">
@@ -5011,7 +4953,7 @@
                 </a:solidFill>
                 <a:latin typeface="Arial"/>
               </a:rPr>
-              <a:t>Kennzahlen je Perspektive</a:t>
+              <a:t>Perspektive:</a:t>
             </a:r>
           </a:p>
           <a:p>
@@ -5020,7 +4962,7 @@
                 <a:spcPts val="767"/>
               </a:lnSpc>
               <a:buFont typeface="Arial"/>
-              <a:buChar char="•"/>
+              <a:buChar char="–"/>
             </a:pPr>
             <a:r>
               <a:rPr lang="de-DE" sz="650" b="0" i="0">
@@ -5029,7 +4971,7 @@
                 </a:solidFill>
                 <a:latin typeface="Arial"/>
               </a:rPr>
-              <a:t>Vorjahr, Forecast und Plan</a:t>
+              <a:t>Kennzahlen</a:t>
             </a:r>
           </a:p>
           <a:p>
@@ -5038,7 +4980,7 @@
                 <a:spcPts val="767"/>
               </a:lnSpc>
               <a:buFont typeface="Arial"/>
-              <a:buChar char="•"/>
+              <a:buChar char="–"/>
             </a:pPr>
             <a:r>
               <a:rPr lang="de-DE" sz="650" b="0" i="0">
@@ -5056,7 +4998,7 @@
                 <a:spcPts val="767"/>
               </a:lnSpc>
               <a:buFont typeface="Arial"/>
-              <a:buChar char="•"/>
+              <a:buChar char="–"/>
             </a:pPr>
             <a:r>
               <a:rPr lang="de-DE" sz="650" b="0" i="0">
@@ -5065,25 +5007,25 @@
                 </a:solidFill>
                 <a:latin typeface="Arial"/>
               </a:rPr>
-              <a:t>Chancen und Risiken mit</a:t>
-            </a:r>
-            <a:br>
+              <a:t>Chancen</a:t>
+            </a:r>
+          </a:p>
+          <a:p>
+            <a:pPr algn="l" marL="79200" indent="-79200">
+              <a:lnSpc>
+                <a:spcPts val="767"/>
+              </a:lnSpc>
+              <a:buFont typeface="Arial"/>
+              <a:buChar char="–"/>
+            </a:pPr>
+            <a:r>
               <a:rPr lang="de-DE" sz="650" b="0" i="0">
                 <a:solidFill>
                   <a:srgbClr val="1A1A1A"/>
                 </a:solidFill>
                 <a:latin typeface="Arial"/>
-                <a:cs typeface="Arial"/>
-              </a:rPr>
-            </a:br>
-            <a:r>
-              <a:rPr lang="de-DE" sz="650" b="0" i="0">
-                <a:solidFill>
-                  <a:srgbClr val="1A1A1A"/>
-                </a:solidFill>
-                <a:latin typeface="Arial"/>
-              </a:rPr>
-              <a:t>Bewertung</a:t>
+              </a:rPr>
+              <a:t>Risiken</a:t>
             </a:r>
           </a:p>
         </p:txBody>
@@ -5096,8 +5038,8 @@
         </p:nvSpPr>
         <p:spPr>
           <a:xfrm>
-            <a:off x="4935600" y="237600"/>
-            <a:ext cx="0" cy="320400"/>
+            <a:off x="4935600" y="540000"/>
+            <a:ext cx="0" cy="468000"/>
           </a:xfrm>
           <a:custGeom>
             <a:avLst/>
@@ -5106,12 +5048,12 @@
             <a:cxnLst/>
             <a:rect l="l" t="t" r="r" b="b"/>
             <a:pathLst>
-              <a:path w="0" h="320400">
+              <a:path w="0" h="468000">
                 <a:moveTo>
                   <a:pt x="0" y="0"/>
                 </a:moveTo>
                 <a:lnTo>
-                  <a:pt x="0" y="320400"/>
+                  <a:pt x="0" y="468000"/>
                 </a:lnTo>
               </a:path>
             </a:pathLst>
@@ -5136,186 +5078,18 @@
       </p:sp>
       <p:sp>
         <p:nvSpPr>
-          <p:cNvPr id="39" name="Externes Reporting"/>
+          <p:cNvPr id="39" name="Teilpläne"/>
           <p:cNvSpPr/>
           <p:nvPr/>
         </p:nvSpPr>
         <p:spPr>
           <a:xfrm>
-            <a:off x="4698000" y="2268000"/>
-            <a:ext cx="871200" cy="566831"/>
+            <a:off x="2160000" y="2047644"/>
+            <a:ext cx="1965600" cy="1360800"/>
           </a:xfrm>
           <a:prstGeom prst="roundRect">
             <a:avLst>
-              <a:gd name="adj" fmla="val 5081"/>
-            </a:avLst>
-          </a:prstGeom>
-          <a:solidFill>
-            <a:srgbClr val="EFEFEF"/>
-          </a:solidFill>
-          <a:ln w="6350">
-            <a:solidFill>
-              <a:srgbClr val="9A9A9A"/>
-            </a:solidFill>
-            <a:round/>
-          </a:ln>
-        </p:spPr>
-        <p:txBody>
-          <a:bodyPr rtlCol="0" anchor="ctr" lIns="32400" rIns="32400" tIns="21600" bIns="21600" wrap="square">
-            <a:noAutofit/>
-          </a:bodyPr>
-          <a:lstStyle/>
-          <a:p>
-            <a:pPr algn="l">
-              <a:lnSpc>
-                <a:spcPts val="826"/>
-              </a:lnSpc>
-              <a:buNone/>
-            </a:pPr>
-            <a:r>
-              <a:rPr lang="de-DE" sz="700" b="1" i="0">
-                <a:solidFill>
-                  <a:srgbClr val="1A1A1A"/>
-                </a:solidFill>
-                <a:latin typeface="Arial"/>
-              </a:rPr>
-              <a:t>Externes</a:t>
-            </a:r>
-            <a:br>
-              <a:rPr lang="de-DE" sz="700" b="1" i="0">
-                <a:solidFill>
-                  <a:srgbClr val="1A1A1A"/>
-                </a:solidFill>
-                <a:latin typeface="Arial"/>
-                <a:cs typeface="Arial"/>
-              </a:rPr>
-            </a:br>
-            <a:r>
-              <a:rPr lang="de-DE" sz="700" b="1" i="0">
-                <a:solidFill>
-                  <a:srgbClr val="1A1A1A"/>
-                </a:solidFill>
-                <a:latin typeface="Arial"/>
-              </a:rPr>
-              <a:t>Reporting</a:t>
-            </a:r>
-          </a:p>
-          <a:p>
-            <a:pPr algn="l" marL="79200" indent="-79200">
-              <a:lnSpc>
-                <a:spcPts val="767"/>
-              </a:lnSpc>
-              <a:buFont typeface="Arial"/>
-              <a:buChar char="•"/>
-            </a:pPr>
-            <a:r>
-              <a:rPr lang="de-DE" sz="650" b="0" i="0">
-                <a:solidFill>
-                  <a:srgbClr val="1A1A1A"/>
-                </a:solidFill>
-                <a:latin typeface="Arial"/>
-              </a:rPr>
-              <a:t>Jahresabschluss</a:t>
-            </a:r>
-          </a:p>
-          <a:p>
-            <a:pPr algn="l" marL="79200" indent="-79200">
-              <a:lnSpc>
-                <a:spcPts val="767"/>
-              </a:lnSpc>
-              <a:buFont typeface="Arial"/>
-              <a:buChar char="•"/>
-            </a:pPr>
-            <a:r>
-              <a:rPr lang="de-DE" sz="650" b="0" i="0">
-                <a:solidFill>
-                  <a:srgbClr val="1A1A1A"/>
-                </a:solidFill>
-                <a:latin typeface="Arial"/>
-              </a:rPr>
-              <a:t>Bankenreporting</a:t>
-            </a:r>
-          </a:p>
-          <a:p>
-            <a:pPr algn="l" marL="79200" indent="-79200">
-              <a:lnSpc>
-                <a:spcPts val="767"/>
-              </a:lnSpc>
-              <a:buFont typeface="Arial"/>
-              <a:buChar char="•"/>
-            </a:pPr>
-            <a:r>
-              <a:rPr lang="de-DE" sz="650" b="0" i="0">
-                <a:solidFill>
-                  <a:srgbClr val="1A1A1A"/>
-                </a:solidFill>
-                <a:latin typeface="Arial"/>
-              </a:rPr>
-              <a:t>Rating</a:t>
-            </a:r>
-          </a:p>
-        </p:txBody>
-      </p:sp>
-      <p:sp>
-        <p:nvSpPr>
-          <p:cNvPr id="40" name="Internes–Externes Reporting"/>
-          <p:cNvSpPr/>
-          <p:nvPr/>
-        </p:nvSpPr>
-        <p:spPr>
-          <a:xfrm>
-            <a:off x="5133600" y="1836000"/>
-            <a:ext cx="0" cy="432000"/>
-          </a:xfrm>
-          <a:custGeom>
-            <a:avLst/>
-            <a:gdLst/>
-            <a:ahLst/>
-            <a:cxnLst/>
-            <a:rect l="l" t="t" r="r" b="b"/>
-            <a:pathLst>
-              <a:path w="0" h="432000">
-                <a:moveTo>
-                  <a:pt x="0" y="0"/>
-                </a:moveTo>
-                <a:lnTo>
-                  <a:pt x="0" y="432000"/>
-                </a:lnTo>
-              </a:path>
-            </a:pathLst>
-          </a:custGeom>
-          <a:noFill/>
-          <a:ln w="9525">
-            <a:solidFill>
-              <a:srgbClr val="3A3F44"/>
-            </a:solidFill>
-            <a:round/>
-            <a:headEnd type="triangle" w="med" len="med"/>
-            <a:tailEnd type="triangle" w="med" len="med"/>
-          </a:ln>
-        </p:spPr>
-        <p:txBody>
-          <a:bodyPr rtlCol="0" anchor="ctr"/>
-          <a:lstStyle/>
-          <a:p>
-            <a:pPr algn="ctr"/>
-          </a:p>
-        </p:txBody>
-      </p:sp>
-      <p:sp>
-        <p:nvSpPr>
-          <p:cNvPr id="41" name="Teilpläne"/>
-          <p:cNvSpPr/>
-          <p:nvPr/>
-        </p:nvSpPr>
-        <p:spPr>
-          <a:xfrm>
-            <a:off x="2160000" y="1944000"/>
-            <a:ext cx="1440000" cy="1508148"/>
-          </a:xfrm>
-          <a:prstGeom prst="roundRect">
-            <a:avLst>
-              <a:gd name="adj" fmla="val 3000"/>
+              <a:gd name="adj" fmla="val 3175"/>
             </a:avLst>
           </a:prstGeom>
           <a:noFill/>
@@ -5335,99 +5109,13 @@
       </p:sp>
       <p:sp>
         <p:nvSpPr>
-          <p:cNvPr id="42" name="Absatz- und Produktionsplanung"/>
+          <p:cNvPr id="40" name="Absatzplan"/>
           <p:cNvSpPr/>
           <p:nvPr/>
         </p:nvSpPr>
         <p:spPr>
           <a:xfrm>
-            <a:off x="2250000" y="2016000"/>
-            <a:ext cx="633600" cy="298548"/>
-          </a:xfrm>
-          <a:prstGeom prst="roundRect">
-            <a:avLst>
-              <a:gd name="adj" fmla="val 9647"/>
-            </a:avLst>
-          </a:prstGeom>
-          <a:solidFill>
-            <a:srgbClr val="EFEFEF"/>
-          </a:solidFill>
-          <a:ln w="6350">
-            <a:solidFill>
-              <a:srgbClr val="9A9A9A"/>
-            </a:solidFill>
-            <a:round/>
-          </a:ln>
-        </p:spPr>
-        <p:txBody>
-          <a:bodyPr rtlCol="0" anchor="ctr" lIns="21600" rIns="21600" tIns="14400" bIns="14400" wrap="square">
-            <a:noAutofit/>
-          </a:bodyPr>
-          <a:lstStyle/>
-          <a:p>
-            <a:pPr algn="ctr">
-              <a:lnSpc>
-                <a:spcPts val="708"/>
-              </a:lnSpc>
-              <a:buNone/>
-            </a:pPr>
-            <a:r>
-              <a:rPr lang="de-DE" sz="600" b="0" i="0">
-                <a:solidFill>
-                  <a:srgbClr val="1A1A1A"/>
-                </a:solidFill>
-                <a:latin typeface="Arial"/>
-              </a:rPr>
-              <a:t>Absatz- und</a:t>
-            </a:r>
-            <a:br>
-              <a:rPr lang="de-DE" sz="600" b="0" i="0">
-                <a:solidFill>
-                  <a:srgbClr val="1A1A1A"/>
-                </a:solidFill>
-                <a:latin typeface="Arial"/>
-                <a:cs typeface="Arial"/>
-              </a:rPr>
-            </a:br>
-            <a:r>
-              <a:rPr lang="de-DE" sz="600" b="0" i="0">
-                <a:solidFill>
-                  <a:srgbClr val="1A1A1A"/>
-                </a:solidFill>
-                <a:latin typeface="Arial"/>
-              </a:rPr>
-              <a:t>Produktions-</a:t>
-            </a:r>
-            <a:br>
-              <a:rPr lang="de-DE" sz="600" b="0" i="0">
-                <a:solidFill>
-                  <a:srgbClr val="1A1A1A"/>
-                </a:solidFill>
-                <a:latin typeface="Arial"/>
-                <a:cs typeface="Arial"/>
-              </a:rPr>
-            </a:br>
-            <a:r>
-              <a:rPr lang="de-DE" sz="600" b="0" i="0">
-                <a:solidFill>
-                  <a:srgbClr val="1A1A1A"/>
-                </a:solidFill>
-                <a:latin typeface="Arial"/>
-              </a:rPr>
-              <a:t>planung</a:t>
-            </a:r>
-          </a:p>
-        </p:txBody>
-      </p:sp>
-      <p:sp>
-        <p:nvSpPr>
-          <p:cNvPr id="43" name="Umsatzplan"/>
-          <p:cNvSpPr/>
-          <p:nvPr/>
-        </p:nvSpPr>
-        <p:spPr>
-          <a:xfrm>
-            <a:off x="2250000" y="2429748"/>
+            <a:off x="2250000" y="2119644"/>
             <a:ext cx="633600" cy="151200"/>
           </a:xfrm>
           <a:prstGeom prst="roundRect">
@@ -5464,20 +5152,20 @@
                 </a:solidFill>
                 <a:latin typeface="Arial"/>
               </a:rPr>
-              <a:t>Umsatzplan</a:t>
-            </a:r>
-          </a:p>
-        </p:txBody>
-      </p:sp>
-      <p:sp>
-        <p:nvSpPr>
-          <p:cNvPr id="44" name="Ressourcenplan"/>
+              <a:t>Absatzplan</a:t>
+            </a:r>
+          </a:p>
+        </p:txBody>
+      </p:sp>
+      <p:sp>
+        <p:nvSpPr>
+          <p:cNvPr id="41" name="Umsatzplan"/>
           <p:cNvSpPr/>
           <p:nvPr/>
         </p:nvSpPr>
         <p:spPr>
           <a:xfrm>
-            <a:off x="2250000" y="2696148"/>
+            <a:off x="2250000" y="2386044"/>
             <a:ext cx="633600" cy="151200"/>
           </a:xfrm>
           <a:prstGeom prst="roundRect">
@@ -5514,20 +5202,20 @@
                 </a:solidFill>
                 <a:latin typeface="Arial"/>
               </a:rPr>
-              <a:t>Ressourcenplan</a:t>
-            </a:r>
-          </a:p>
-        </p:txBody>
-      </p:sp>
-      <p:sp>
-        <p:nvSpPr>
-          <p:cNvPr id="45" name="Personalplan"/>
+              <a:t>Umsatzplan</a:t>
+            </a:r>
+          </a:p>
+        </p:txBody>
+      </p:sp>
+      <p:sp>
+        <p:nvSpPr>
+          <p:cNvPr id="42" name="Ressourcenplan"/>
           <p:cNvSpPr/>
           <p:nvPr/>
         </p:nvSpPr>
         <p:spPr>
           <a:xfrm>
-            <a:off x="2250000" y="2962548"/>
+            <a:off x="2250000" y="2652444"/>
             <a:ext cx="633600" cy="151200"/>
           </a:xfrm>
           <a:prstGeom prst="roundRect">
@@ -5564,20 +5252,20 @@
                 </a:solidFill>
                 <a:latin typeface="Arial"/>
               </a:rPr>
-              <a:t>Personalplan</a:t>
-            </a:r>
-          </a:p>
-        </p:txBody>
-      </p:sp>
-      <p:sp>
-        <p:nvSpPr>
-          <p:cNvPr id="46" name="Kostenplan"/>
+              <a:t>Ressourcenplan</a:t>
+            </a:r>
+          </a:p>
+        </p:txBody>
+      </p:sp>
+      <p:sp>
+        <p:nvSpPr>
+          <p:cNvPr id="43" name="Personalplan"/>
           <p:cNvSpPr/>
           <p:nvPr/>
         </p:nvSpPr>
         <p:spPr>
           <a:xfrm>
-            <a:off x="2250000" y="3228948"/>
+            <a:off x="2250000" y="2918844"/>
             <a:ext cx="633600" cy="151200"/>
           </a:xfrm>
           <a:prstGeom prst="roundRect">
@@ -5614,21 +5302,21 @@
                 </a:solidFill>
                 <a:latin typeface="Arial"/>
               </a:rPr>
-              <a:t>Kostenplan</a:t>
-            </a:r>
-          </a:p>
-        </p:txBody>
-      </p:sp>
-      <p:sp>
-        <p:nvSpPr>
-          <p:cNvPr id="47" name="Ergebnisplan"/>
+              <a:t>Personalplan</a:t>
+            </a:r>
+          </a:p>
+        </p:txBody>
+      </p:sp>
+      <p:sp>
+        <p:nvSpPr>
+          <p:cNvPr id="44" name="Kostenplan"/>
           <p:cNvSpPr/>
           <p:nvPr/>
         </p:nvSpPr>
         <p:spPr>
           <a:xfrm>
-            <a:off x="3045600" y="2429748"/>
-            <a:ext cx="525600" cy="151200"/>
+            <a:off x="2250000" y="3185244"/>
+            <a:ext cx="633600" cy="151200"/>
           </a:xfrm>
           <a:prstGeom prst="roundRect">
             <a:avLst>
@@ -5664,20 +5352,20 @@
                 </a:solidFill>
                 <a:latin typeface="Arial"/>
               </a:rPr>
-              <a:t>Ergebnisplan</a:t>
-            </a:r>
-          </a:p>
-        </p:txBody>
-      </p:sp>
-      <p:sp>
-        <p:nvSpPr>
-          <p:cNvPr id="48" name="Bilanzplan"/>
+              <a:t>Kostenplan</a:t>
+            </a:r>
+          </a:p>
+        </p:txBody>
+      </p:sp>
+      <p:sp>
+        <p:nvSpPr>
+          <p:cNvPr id="45" name="Ergebnisplan"/>
           <p:cNvSpPr/>
           <p:nvPr/>
         </p:nvSpPr>
         <p:spPr>
           <a:xfrm>
-            <a:off x="3045600" y="2696148"/>
+            <a:off x="3009600" y="2386044"/>
             <a:ext cx="525600" cy="151200"/>
           </a:xfrm>
           <a:prstGeom prst="roundRect">
@@ -5714,20 +5402,70 @@
                 </a:solidFill>
                 <a:latin typeface="Arial"/>
               </a:rPr>
-              <a:t>Bilanzplan</a:t>
-            </a:r>
-          </a:p>
-        </p:txBody>
-      </p:sp>
-      <p:sp>
-        <p:nvSpPr>
-          <p:cNvPr id="49" name="Teilpläne wechselseitig"/>
+              <a:t>Ergebnisplan</a:t>
+            </a:r>
+          </a:p>
+        </p:txBody>
+      </p:sp>
+      <p:sp>
+        <p:nvSpPr>
+          <p:cNvPr id="46" name="Bilanzplan"/>
           <p:cNvSpPr/>
           <p:nvPr/>
         </p:nvSpPr>
         <p:spPr>
           <a:xfrm>
-            <a:off x="2566800" y="2314548"/>
+            <a:off x="3625200" y="2688444"/>
+            <a:ext cx="446400" cy="151200"/>
+          </a:xfrm>
+          <a:prstGeom prst="roundRect">
+            <a:avLst>
+              <a:gd name="adj" fmla="val 19048"/>
+            </a:avLst>
+          </a:prstGeom>
+          <a:solidFill>
+            <a:srgbClr val="EFEFEF"/>
+          </a:solidFill>
+          <a:ln w="6350">
+            <a:solidFill>
+              <a:srgbClr val="9A9A9A"/>
+            </a:solidFill>
+            <a:round/>
+          </a:ln>
+        </p:spPr>
+        <p:txBody>
+          <a:bodyPr rtlCol="0" anchor="ctr" lIns="21600" rIns="21600" tIns="14400" bIns="14400" wrap="square">
+            <a:noAutofit/>
+          </a:bodyPr>
+          <a:lstStyle/>
+          <a:p>
+            <a:pPr algn="ctr">
+              <a:lnSpc>
+                <a:spcPts val="708"/>
+              </a:lnSpc>
+              <a:buNone/>
+            </a:pPr>
+            <a:r>
+              <a:rPr lang="de-DE" sz="600" b="0" i="0">
+                <a:solidFill>
+                  <a:srgbClr val="1A1A1A"/>
+                </a:solidFill>
+                <a:latin typeface="Arial"/>
+              </a:rPr>
+              <a:t>Bilanzplan</a:t>
+            </a:r>
+          </a:p>
+        </p:txBody>
+      </p:sp>
+      <p:sp>
+        <p:nvSpPr>
+          <p:cNvPr id="47" name="Teilpläne wechselseitig"/>
+          <p:cNvSpPr/>
+          <p:nvPr/>
+        </p:nvSpPr>
+        <p:spPr>
+          <a:xfrm>
+            <a:off x="2566800" y="2270844"/>
             <a:ext cx="0" cy="115200"/>
           </a:xfrm>
           <a:custGeom>
@@ -5767,13 +5505,13 @@
       </p:sp>
       <p:sp>
         <p:nvSpPr>
-          <p:cNvPr id="50" name="Teilpläne wechselseitig"/>
+          <p:cNvPr id="48" name="Teilpläne wechselseitig"/>
           <p:cNvSpPr/>
           <p:nvPr/>
         </p:nvSpPr>
         <p:spPr>
           <a:xfrm>
-            <a:off x="2566800" y="2847348"/>
+            <a:off x="2566800" y="2803644"/>
             <a:ext cx="0" cy="115200"/>
           </a:xfrm>
           <a:custGeom>
@@ -5813,13 +5551,13 @@
       </p:sp>
       <p:sp>
         <p:nvSpPr>
-          <p:cNvPr id="51" name="Teilpläne wechselseitig"/>
+          <p:cNvPr id="49" name="Teilpläne wechselseitig"/>
           <p:cNvSpPr/>
           <p:nvPr/>
         </p:nvSpPr>
         <p:spPr>
           <a:xfrm>
-            <a:off x="2566800" y="3113748"/>
+            <a:off x="2566800" y="3070044"/>
             <a:ext cx="0" cy="115200"/>
           </a:xfrm>
           <a:custGeom>
@@ -5859,14 +5597,14 @@
       </p:sp>
       <p:sp>
         <p:nvSpPr>
-          <p:cNvPr id="52" name="Ergebnis–Bilanz"/>
+          <p:cNvPr id="50" name="Absatz–Ressourcen"/>
           <p:cNvSpPr/>
           <p:nvPr/>
         </p:nvSpPr>
         <p:spPr>
           <a:xfrm>
-            <a:off x="3308400" y="2580948"/>
-            <a:ext cx="0" cy="115200"/>
+            <a:off x="2203200" y="2195244"/>
+            <a:ext cx="46800" cy="532800"/>
           </a:xfrm>
           <a:custGeom>
             <a:avLst/>
@@ -5875,58 +5613,18 @@
             <a:cxnLst/>
             <a:rect l="l" t="t" r="r" b="b"/>
             <a:pathLst>
-              <a:path w="0" h="115200">
+              <a:path w="46800" h="532800">
                 <a:moveTo>
-                  <a:pt x="0" y="0"/>
+                  <a:pt x="46800" y="0"/>
                 </a:moveTo>
                 <a:lnTo>
-                  <a:pt x="0" y="115200"/>
+                  <a:pt x="0" y="0"/>
                 </a:lnTo>
-              </a:path>
-            </a:pathLst>
-          </a:custGeom>
-          <a:noFill/>
-          <a:ln w="9525">
-            <a:solidFill>
-              <a:srgbClr val="3A3F44"/>
-            </a:solidFill>
-            <a:round/>
-            <a:headEnd type="triangle" w="sm" len="sm"/>
-            <a:tailEnd type="triangle" w="sm" len="sm"/>
-          </a:ln>
-        </p:spPr>
-        <p:txBody>
-          <a:bodyPr rtlCol="0" anchor="ctr"/>
-          <a:lstStyle/>
-          <a:p>
-            <a:pPr algn="ctr"/>
-          </a:p>
-        </p:txBody>
-      </p:sp>
-      <p:sp>
-        <p:nvSpPr>
-          <p:cNvPr id="53" name="Umsatz–Ergebnis"/>
-          <p:cNvSpPr/>
-          <p:nvPr/>
-        </p:nvSpPr>
-        <p:spPr>
-          <a:xfrm>
-            <a:off x="2883600" y="2505348"/>
-            <a:ext cx="162000" cy="0"/>
-          </a:xfrm>
-          <a:custGeom>
-            <a:avLst/>
-            <a:gdLst/>
-            <a:ahLst/>
-            <a:cxnLst/>
-            <a:rect l="l" t="t" r="r" b="b"/>
-            <a:pathLst>
-              <a:path w="162000" h="0">
-                <a:moveTo>
-                  <a:pt x="0" y="0"/>
-                </a:moveTo>
                 <a:lnTo>
-                  <a:pt x="162000" y="0"/>
+                  <a:pt x="0" y="532800"/>
+                </a:lnTo>
+                <a:lnTo>
+                  <a:pt x="46800" y="532800"/>
                 </a:lnTo>
               </a:path>
             </a:pathLst>
@@ -5950,14 +5648,14 @@
       </p:sp>
       <p:sp>
         <p:nvSpPr>
-          <p:cNvPr id="54" name="Ressourcen–Bilanz"/>
+          <p:cNvPr id="51" name="Umsatz–Ergebnis"/>
           <p:cNvSpPr/>
           <p:nvPr/>
         </p:nvSpPr>
         <p:spPr>
           <a:xfrm>
-            <a:off x="2883600" y="2771748"/>
-            <a:ext cx="162000" cy="0"/>
+            <a:off x="2883600" y="2461644"/>
+            <a:ext cx="126000" cy="0"/>
           </a:xfrm>
           <a:custGeom>
             <a:avLst/>
@@ -5966,12 +5664,12 @@
             <a:cxnLst/>
             <a:rect l="l" t="t" r="r" b="b"/>
             <a:pathLst>
-              <a:path w="162000" h="0">
+              <a:path w="126000" h="0">
                 <a:moveTo>
                   <a:pt x="0" y="0"/>
                 </a:moveTo>
                 <a:lnTo>
-                  <a:pt x="162000" y="0"/>
+                  <a:pt x="126000" y="0"/>
                 </a:lnTo>
               </a:path>
             </a:pathLst>
@@ -5995,14 +5693,14 @@
       </p:sp>
       <p:sp>
         <p:nvSpPr>
-          <p:cNvPr id="55" name="Sammelleitung"/>
+          <p:cNvPr id="52" name="Ressourcen–Ergebnis"/>
           <p:cNvSpPr/>
           <p:nvPr/>
         </p:nvSpPr>
         <p:spPr>
           <a:xfrm>
-            <a:off x="2964600" y="2505348"/>
-            <a:ext cx="0" cy="266400"/>
+            <a:off x="2883600" y="2537244"/>
+            <a:ext cx="280800" cy="154800"/>
           </a:xfrm>
           <a:custGeom>
             <a:avLst/>
@@ -6011,117 +5709,15 @@
             <a:cxnLst/>
             <a:rect l="l" t="t" r="r" b="b"/>
             <a:pathLst>
-              <a:path w="0" h="266400">
+              <a:path w="280800" h="154800">
                 <a:moveTo>
-                  <a:pt x="0" y="0"/>
+                  <a:pt x="0" y="154800"/>
                 </a:moveTo>
                 <a:lnTo>
-                  <a:pt x="0" y="266400"/>
-                </a:lnTo>
-              </a:path>
-            </a:pathLst>
-          </a:custGeom>
-          <a:noFill/>
-          <a:ln w="9525">
-            <a:solidFill>
-              <a:srgbClr val="3A3F44"/>
-            </a:solidFill>
-            <a:round/>
-          </a:ln>
-        </p:spPr>
-        <p:txBody>
-          <a:bodyPr rtlCol="0" anchor="ctr"/>
-          <a:lstStyle/>
-          <a:p>
-            <a:pPr algn="ctr"/>
-          </a:p>
-        </p:txBody>
-      </p:sp>
-      <p:sp>
-        <p:nvSpPr>
-          <p:cNvPr id="56" name="Knoten"/>
-          <p:cNvSpPr/>
-          <p:nvPr/>
-        </p:nvSpPr>
-        <p:spPr>
-          <a:xfrm>
-            <a:off x="2948400" y="2489148"/>
-            <a:ext cx="32400" cy="32400"/>
-          </a:xfrm>
-          <a:prstGeom prst="ellipse">
-            <a:avLst/>
-          </a:prstGeom>
-          <a:solidFill>
-            <a:srgbClr val="3A3F44"/>
-          </a:solidFill>
-          <a:ln>
-            <a:noFill/>
-          </a:ln>
-        </p:spPr>
-        <p:txBody>
-          <a:bodyPr rtlCol="0" anchor="ctr"/>
-          <a:lstStyle/>
-          <a:p>
-            <a:pPr algn="ctr"/>
-          </a:p>
-        </p:txBody>
-      </p:sp>
-      <p:sp>
-        <p:nvSpPr>
-          <p:cNvPr id="57" name="Knoten"/>
-          <p:cNvSpPr/>
-          <p:nvPr/>
-        </p:nvSpPr>
-        <p:spPr>
-          <a:xfrm>
-            <a:off x="2948400" y="2755548"/>
-            <a:ext cx="32400" cy="32400"/>
-          </a:xfrm>
-          <a:prstGeom prst="ellipse">
-            <a:avLst/>
-          </a:prstGeom>
-          <a:solidFill>
-            <a:srgbClr val="3A3F44"/>
-          </a:solidFill>
-          <a:ln>
-            <a:noFill/>
-          </a:ln>
-        </p:spPr>
-        <p:txBody>
-          <a:bodyPr rtlCol="0" anchor="ctr"/>
-          <a:lstStyle/>
-          <a:p>
-            <a:pPr algn="ctr"/>
-          </a:p>
-        </p:txBody>
-      </p:sp>
-      <p:sp>
-        <p:nvSpPr>
-          <p:cNvPr id="58" name="Kosten–Bilanz"/>
-          <p:cNvSpPr/>
-          <p:nvPr/>
-        </p:nvSpPr>
-        <p:spPr>
-          <a:xfrm>
-            <a:off x="2883600" y="2847348"/>
-            <a:ext cx="424800" cy="457200"/>
-          </a:xfrm>
-          <a:custGeom>
-            <a:avLst/>
-            <a:gdLst/>
-            <a:ahLst/>
-            <a:cxnLst/>
-            <a:rect l="l" t="t" r="r" b="b"/>
-            <a:pathLst>
-              <a:path w="424800" h="457200">
-                <a:moveTo>
-                  <a:pt x="0" y="457200"/>
-                </a:moveTo>
-                <a:lnTo>
-                  <a:pt x="424800" y="457200"/>
+                  <a:pt x="280800" y="154800"/>
                 </a:lnTo>
                 <a:lnTo>
-                  <a:pt x="424800" y="0"/>
+                  <a:pt x="280800" y="0"/>
                 </a:lnTo>
               </a:path>
             </a:pathLst>
@@ -6145,14 +5741,14 @@
       </p:sp>
       <p:sp>
         <p:nvSpPr>
-          <p:cNvPr id="59" name="Absatz/Produktion–Ressourcen"/>
+          <p:cNvPr id="53" name="Ressourcen–Bilanz"/>
           <p:cNvSpPr/>
           <p:nvPr/>
         </p:nvSpPr>
         <p:spPr>
           <a:xfrm>
-            <a:off x="2203200" y="2165274"/>
-            <a:ext cx="46800" cy="606474"/>
+            <a:off x="2883600" y="2764044"/>
+            <a:ext cx="741600" cy="0"/>
           </a:xfrm>
           <a:custGeom>
             <a:avLst/>
@@ -6161,18 +5757,12 @@
             <a:cxnLst/>
             <a:rect l="l" t="t" r="r" b="b"/>
             <a:pathLst>
-              <a:path w="46800" h="606474">
+              <a:path w="741600" h="0">
                 <a:moveTo>
-                  <a:pt x="46800" y="0"/>
+                  <a:pt x="0" y="0"/>
                 </a:moveTo>
                 <a:lnTo>
-                  <a:pt x="0" y="0"/>
-                </a:lnTo>
-                <a:lnTo>
-                  <a:pt x="0" y="606474"/>
-                </a:lnTo>
-                <a:lnTo>
-                  <a:pt x="46800" y="606474"/>
+                  <a:pt x="741600" y="0"/>
                 </a:lnTo>
               </a:path>
             </a:pathLst>
@@ -6196,7 +5786,103 @@
       </p:sp>
       <p:sp>
         <p:nvSpPr>
-          <p:cNvPr id="60" name="Strategische Projekte"/>
+          <p:cNvPr id="54" name="Kosten–Ergebnis"/>
+          <p:cNvSpPr/>
+          <p:nvPr/>
+        </p:nvSpPr>
+        <p:spPr>
+          <a:xfrm>
+            <a:off x="2883600" y="2537244"/>
+            <a:ext cx="496800" cy="723600"/>
+          </a:xfrm>
+          <a:custGeom>
+            <a:avLst/>
+            <a:gdLst/>
+            <a:ahLst/>
+            <a:cxnLst/>
+            <a:rect l="l" t="t" r="r" b="b"/>
+            <a:pathLst>
+              <a:path w="496800" h="723600">
+                <a:moveTo>
+                  <a:pt x="0" y="723600"/>
+                </a:moveTo>
+                <a:lnTo>
+                  <a:pt x="496800" y="723600"/>
+                </a:lnTo>
+                <a:lnTo>
+                  <a:pt x="496800" y="0"/>
+                </a:lnTo>
+              </a:path>
+            </a:pathLst>
+          </a:custGeom>
+          <a:noFill/>
+          <a:ln w="9525">
+            <a:solidFill>
+              <a:srgbClr val="3A3F44"/>
+            </a:solidFill>
+            <a:round/>
+            <a:tailEnd type="triangle" w="sm" len="sm"/>
+          </a:ln>
+        </p:spPr>
+        <p:txBody>
+          <a:bodyPr rtlCol="0" anchor="ctr"/>
+          <a:lstStyle/>
+          <a:p>
+            <a:pPr algn="ctr"/>
+          </a:p>
+        </p:txBody>
+      </p:sp>
+      <p:sp>
+        <p:nvSpPr>
+          <p:cNvPr id="55" name="Ergebnis–Bilanz"/>
+          <p:cNvSpPr/>
+          <p:nvPr/>
+        </p:nvSpPr>
+        <p:spPr>
+          <a:xfrm>
+            <a:off x="3535200" y="2461644"/>
+            <a:ext cx="313200" cy="226800"/>
+          </a:xfrm>
+          <a:custGeom>
+            <a:avLst/>
+            <a:gdLst/>
+            <a:ahLst/>
+            <a:cxnLst/>
+            <a:rect l="l" t="t" r="r" b="b"/>
+            <a:pathLst>
+              <a:path w="313200" h="226800">
+                <a:moveTo>
+                  <a:pt x="0" y="0"/>
+                </a:moveTo>
+                <a:lnTo>
+                  <a:pt x="313200" y="0"/>
+                </a:lnTo>
+                <a:lnTo>
+                  <a:pt x="313200" y="226800"/>
+                </a:lnTo>
+              </a:path>
+            </a:pathLst>
+          </a:custGeom>
+          <a:noFill/>
+          <a:ln w="9525">
+            <a:solidFill>
+              <a:srgbClr val="3A3F44"/>
+            </a:solidFill>
+            <a:round/>
+            <a:tailEnd type="triangle" w="sm" len="sm"/>
+          </a:ln>
+        </p:spPr>
+        <p:txBody>
+          <a:bodyPr rtlCol="0" anchor="ctr"/>
+          <a:lstStyle/>
+          <a:p>
+            <a:pPr algn="ctr"/>
+          </a:p>
+        </p:txBody>
+      </p:sp>
+      <p:sp>
+        <p:nvSpPr>
+          <p:cNvPr id="56" name="Strategische Projekte"/>
           <p:cNvSpPr/>
           <p:nvPr/>
         </p:nvSpPr>
@@ -6244,7 +5930,7 @@
       </p:sp>
       <p:sp>
         <p:nvSpPr>
-          <p:cNvPr id="61" name="Strategische&#10;Projekte"/>
+          <p:cNvPr id="57" name="Strategische&#10;Projekte"/>
           <p:cNvSpPr txBox="1"/>
           <p:nvPr/>
         </p:nvSpPr>
@@ -6302,13 +5988,13 @@
       </p:sp>
       <p:sp>
         <p:nvSpPr>
-          <p:cNvPr id="62" name="BCR-Card-Forecast"/>
+          <p:cNvPr id="58" name="BCR-Card-Forecast"/>
           <p:cNvSpPr/>
           <p:nvPr/>
         </p:nvSpPr>
         <p:spPr>
           <a:xfrm>
-            <a:off x="3600000" y="756000"/>
+            <a:off x="3600000" y="1116000"/>
             <a:ext cx="702000" cy="0"/>
           </a:xfrm>
           <a:custGeom>
@@ -6347,13 +6033,13 @@
       </p:sp>
       <p:sp>
         <p:nvSpPr>
-          <p:cNvPr id="63" name="BCR-Card-&#10;Forecast"/>
+          <p:cNvPr id="59" name="BCR-Card-&#10;Forecast"/>
           <p:cNvSpPr txBox="1"/>
           <p:nvPr/>
         </p:nvSpPr>
         <p:spPr>
           <a:xfrm>
-            <a:off x="3686400" y="532800"/>
+            <a:off x="3686400" y="892800"/>
             <a:ext cx="601200" cy="216000"/>
           </a:xfrm>
           <a:prstGeom prst="rect">
@@ -6405,13 +6091,13 @@
       </p:sp>
       <p:sp>
         <p:nvSpPr>
-          <p:cNvPr id="64" name="Strategische Ziele"/>
+          <p:cNvPr id="60" name="Strategische Ziele"/>
           <p:cNvSpPr/>
           <p:nvPr/>
         </p:nvSpPr>
         <p:spPr>
           <a:xfrm>
-            <a:off x="3600000" y="1188000"/>
+            <a:off x="3600000" y="1260000"/>
             <a:ext cx="702000" cy="0"/>
           </a:xfrm>
           <a:custGeom>
@@ -6450,13 +6136,13 @@
       </p:sp>
       <p:sp>
         <p:nvSpPr>
-          <p:cNvPr id="65" name="Strategische&#10;Ziele/Projekte&#10;so"/>
+          <p:cNvPr id="61" name="Strategische&#10;Ziele/Projekte&#10;so"/>
           <p:cNvSpPr txBox="1"/>
           <p:nvPr/>
         </p:nvSpPr>
         <p:spPr>
           <a:xfrm>
-            <a:off x="3636000" y="1206000"/>
+            <a:off x="3636000" y="1278000"/>
             <a:ext cx="651600" cy="432000"/>
           </a:xfrm>
           <a:prstGeom prst="rect">
@@ -6544,13 +6230,13 @@
       </p:sp>
       <p:sp>
         <p:nvSpPr>
-          <p:cNvPr id="66" name="Roadmap–BCR"/>
+          <p:cNvPr id="62" name="Roadmap–BCR"/>
           <p:cNvSpPr/>
           <p:nvPr/>
         </p:nvSpPr>
         <p:spPr>
           <a:xfrm>
-            <a:off x="2052000" y="1674000"/>
+            <a:off x="2052000" y="1831644"/>
             <a:ext cx="2250000" cy="0"/>
           </a:xfrm>
           <a:custGeom>
@@ -6590,14 +6276,14 @@
       </p:sp>
       <p:sp>
         <p:nvSpPr>
-          <p:cNvPr id="67" name="Operative Einlastung"/>
+          <p:cNvPr id="63" name="Operative Einlastung"/>
           <p:cNvSpPr/>
           <p:nvPr/>
         </p:nvSpPr>
         <p:spPr>
           <a:xfrm>
-            <a:off x="1296000" y="1800000"/>
-            <a:ext cx="864000" cy="1224000"/>
+            <a:off x="1296000" y="1939644"/>
+            <a:ext cx="864000" cy="1252800"/>
           </a:xfrm>
           <a:custGeom>
             <a:avLst/>
@@ -6606,15 +6292,15 @@
             <a:cxnLst/>
             <a:rect l="l" t="t" r="r" b="b"/>
             <a:pathLst>
-              <a:path w="864000" h="1224000">
+              <a:path w="864000" h="1252800">
                 <a:moveTo>
                   <a:pt x="0" y="0"/>
                 </a:moveTo>
                 <a:lnTo>
-                  <a:pt x="0" y="1224000"/>
+                  <a:pt x="0" y="1252800"/>
                 </a:lnTo>
                 <a:lnTo>
-                  <a:pt x="864000" y="1224000"/>
+                  <a:pt x="864000" y="1252800"/>
                 </a:lnTo>
               </a:path>
             </a:pathLst>
@@ -6638,13 +6324,13 @@
       </p:sp>
       <p:sp>
         <p:nvSpPr>
-          <p:cNvPr id="68" name="operative&#10;Einlastung&#10;strategis"/>
+          <p:cNvPr id="64" name="operative&#10;Einlastung&#10;strategis"/>
           <p:cNvSpPr txBox="1"/>
           <p:nvPr/>
         </p:nvSpPr>
         <p:spPr>
           <a:xfrm>
-            <a:off x="1317600" y="2376000"/>
+            <a:off x="1317600" y="2544444"/>
             <a:ext cx="828000" cy="630000"/>
           </a:xfrm>
           <a:prstGeom prst="rect">
@@ -6732,14 +6418,14 @@
       </p:sp>
       <p:sp>
         <p:nvSpPr>
-          <p:cNvPr id="69" name="BCR-Vorgabe"/>
+          <p:cNvPr id="65" name="BCR-Vorgabe"/>
           <p:cNvSpPr/>
           <p:nvPr/>
         </p:nvSpPr>
         <p:spPr>
           <a:xfrm>
-            <a:off x="3600000" y="1836000"/>
-            <a:ext cx="810000" cy="324000"/>
+            <a:off x="4125600" y="1939644"/>
+            <a:ext cx="320400" cy="288000"/>
           </a:xfrm>
           <a:custGeom>
             <a:avLst/>
@@ -6748,15 +6434,15 @@
             <a:cxnLst/>
             <a:rect l="l" t="t" r="r" b="b"/>
             <a:pathLst>
-              <a:path w="810000" h="324000">
+              <a:path w="320400" h="288000">
                 <a:moveTo>
-                  <a:pt x="810000" y="0"/>
+                  <a:pt x="320400" y="0"/>
                 </a:moveTo>
                 <a:lnTo>
-                  <a:pt x="810000" y="324000"/>
+                  <a:pt x="320400" y="288000"/>
                 </a:lnTo>
                 <a:lnTo>
-                  <a:pt x="0" y="324000"/>
+                  <a:pt x="0" y="288000"/>
                 </a:lnTo>
               </a:path>
             </a:pathLst>
@@ -6780,14 +6466,14 @@
       </p:sp>
       <p:sp>
         <p:nvSpPr>
-          <p:cNvPr id="70" name="BCR-Vorgabe"/>
+          <p:cNvPr id="66" name="BCR-Vorgabe"/>
           <p:cNvSpPr txBox="1"/>
           <p:nvPr/>
         </p:nvSpPr>
         <p:spPr>
           <a:xfrm>
-            <a:off x="3686400" y="2030400"/>
-            <a:ext cx="709200" cy="122400"/>
+            <a:off x="4482000" y="1957644"/>
+            <a:ext cx="612000" cy="252000"/>
           </a:xfrm>
           <a:prstGeom prst="rect">
             <a:avLst/>
@@ -6820,14 +6506,14 @@
       </p:sp>
       <p:sp>
         <p:nvSpPr>
-          <p:cNvPr id="71" name="Gesamtplanung"/>
+          <p:cNvPr id="67" name="Gesamtplanung"/>
           <p:cNvSpPr/>
           <p:nvPr/>
         </p:nvSpPr>
         <p:spPr>
           <a:xfrm>
-            <a:off x="3600000" y="1836000"/>
-            <a:ext cx="972000" cy="1332000"/>
+            <a:off x="4125600" y="1939644"/>
+            <a:ext cx="968400" cy="1360800"/>
           </a:xfrm>
           <a:custGeom>
             <a:avLst/>
@@ -6836,15 +6522,15 @@
             <a:cxnLst/>
             <a:rect l="l" t="t" r="r" b="b"/>
             <a:pathLst>
-              <a:path w="972000" h="1332000">
+              <a:path w="968400" h="1360800">
                 <a:moveTo>
-                  <a:pt x="0" y="1332000"/>
+                  <a:pt x="0" y="1360800"/>
                 </a:moveTo>
                 <a:lnTo>
-                  <a:pt x="972000" y="1332000"/>
+                  <a:pt x="968400" y="1360800"/>
                 </a:lnTo>
                 <a:lnTo>
-                  <a:pt x="972000" y="0"/>
+                  <a:pt x="968400" y="0"/>
                 </a:lnTo>
               </a:path>
             </a:pathLst>
@@ -6868,14 +6554,14 @@
       </p:sp>
       <p:sp>
         <p:nvSpPr>
-          <p:cNvPr id="72" name="Gesamtplanung&#10;bis zum BCR-Plan"/>
+          <p:cNvPr id="68" name="Gesamtplanung&#10;bis zum BCR-Plan"/>
           <p:cNvSpPr txBox="1"/>
           <p:nvPr/>
         </p:nvSpPr>
         <p:spPr>
           <a:xfrm>
-            <a:off x="3636000" y="2937600"/>
-            <a:ext cx="921600" cy="223200"/>
+            <a:off x="4161600" y="3070044"/>
+            <a:ext cx="918000" cy="223200"/>
           </a:xfrm>
           <a:prstGeom prst="rect">
             <a:avLst/>

--- a/abbildungen/kap3/Gesamtmodellueberblick_fuer_die_integrierte_Unternehmensplanung_und_-steuerung.pptx
+++ b/abbildungen/kap3/Gesamtmodellueberblick_fuer_die_integrierte_Unternehmensplanung_und_-steuerung.pptx
@@ -3097,11 +3097,11 @@
         <p:spPr>
           <a:xfrm>
             <a:off x="10800" y="10800"/>
-            <a:ext cx="828000" cy="576000"/>
+            <a:ext cx="828000" cy="792000"/>
           </a:xfrm>
           <a:prstGeom prst="roundRect">
             <a:avLst>
-              <a:gd name="adj" fmla="val 5000"/>
+              <a:gd name="adj" fmla="val 3636"/>
             </a:avLst>
           </a:prstGeom>
           <a:solidFill>
@@ -3221,7 +3221,129 @@
         <p:spPr>
           <a:xfrm>
             <a:off x="10800" y="1008000"/>
-            <a:ext cx="828000" cy="931644"/>
+            <a:ext cx="828000" cy="792000"/>
+          </a:xfrm>
+          <a:prstGeom prst="roundRect">
+            <a:avLst>
+              <a:gd name="adj" fmla="val 3636"/>
+            </a:avLst>
+          </a:prstGeom>
+          <a:solidFill>
+            <a:srgbClr val="CFCFCF"/>
+          </a:solidFill>
+          <a:ln w="6350">
+            <a:solidFill>
+              <a:srgbClr val="8A8A8A"/>
+            </a:solidFill>
+            <a:round/>
+          </a:ln>
+        </p:spPr>
+        <p:txBody>
+          <a:bodyPr rtlCol="0" anchor="ctr" lIns="32400" rIns="32400" tIns="21600" bIns="21600" wrap="square">
+            <a:noAutofit/>
+          </a:bodyPr>
+          <a:lstStyle/>
+          <a:p>
+            <a:pPr algn="ctr">
+              <a:lnSpc>
+                <a:spcPts val="826"/>
+              </a:lnSpc>
+              <a:buNone/>
+            </a:pPr>
+            <a:r>
+              <a:rPr lang="de-DE" sz="700" b="1" i="0">
+                <a:solidFill>
+                  <a:srgbClr val="1A1A1A"/>
+                </a:solidFill>
+                <a:latin typeface="Arial"/>
+              </a:rPr>
+              <a:t>Verzahnung</a:t>
+            </a:r>
+            <a:br>
+              <a:rPr lang="de-DE" sz="700" b="1" i="0">
+                <a:solidFill>
+                  <a:srgbClr val="1A1A1A"/>
+                </a:solidFill>
+                <a:latin typeface="Arial"/>
+                <a:cs typeface="Arial"/>
+              </a:rPr>
+            </a:br>
+            <a:r>
+              <a:rPr lang="de-DE" sz="700" b="1" i="0">
+                <a:solidFill>
+                  <a:srgbClr val="1A1A1A"/>
+                </a:solidFill>
+                <a:latin typeface="Arial"/>
+              </a:rPr>
+              <a:t>strategischer</a:t>
+            </a:r>
+            <a:br>
+              <a:rPr lang="de-DE" sz="700" b="1" i="0">
+                <a:solidFill>
+                  <a:srgbClr val="1A1A1A"/>
+                </a:solidFill>
+                <a:latin typeface="Arial"/>
+                <a:cs typeface="Arial"/>
+              </a:rPr>
+            </a:br>
+            <a:r>
+              <a:rPr lang="de-DE" sz="700" b="1" i="0">
+                <a:solidFill>
+                  <a:srgbClr val="1A1A1A"/>
+                </a:solidFill>
+                <a:latin typeface="Arial"/>
+              </a:rPr>
+              <a:t>und operativ-</a:t>
+            </a:r>
+            <a:br>
+              <a:rPr lang="de-DE" sz="700" b="1" i="0">
+                <a:solidFill>
+                  <a:srgbClr val="1A1A1A"/>
+                </a:solidFill>
+                <a:latin typeface="Arial"/>
+                <a:cs typeface="Arial"/>
+              </a:rPr>
+            </a:br>
+            <a:r>
+              <a:rPr lang="de-DE" sz="700" b="1" i="0">
+                <a:solidFill>
+                  <a:srgbClr val="1A1A1A"/>
+                </a:solidFill>
+                <a:latin typeface="Arial"/>
+              </a:rPr>
+              <a:t>taktischer</a:t>
+            </a:r>
+            <a:br>
+              <a:rPr lang="de-DE" sz="700" b="1" i="0">
+                <a:solidFill>
+                  <a:srgbClr val="1A1A1A"/>
+                </a:solidFill>
+                <a:latin typeface="Arial"/>
+                <a:cs typeface="Arial"/>
+              </a:rPr>
+            </a:br>
+            <a:r>
+              <a:rPr lang="de-DE" sz="700" b="1" i="0">
+                <a:solidFill>
+                  <a:srgbClr val="1A1A1A"/>
+                </a:solidFill>
+                <a:latin typeface="Arial"/>
+              </a:rPr>
+              <a:t>Planung</a:t>
+            </a:r>
+          </a:p>
+        </p:txBody>
+      </p:sp>
+      <p:sp>
+        <p:nvSpPr>
+          <p:cNvPr id="4" name="Ebene Simulative Planung"/>
+          <p:cNvSpPr/>
+          <p:nvPr/>
+        </p:nvSpPr>
+        <p:spPr>
+          <a:xfrm>
+            <a:off x="10800" y="2304000"/>
+            <a:ext cx="828000" cy="1177200"/>
           </a:xfrm>
           <a:prstGeom prst="roundRect">
             <a:avLst>
@@ -3257,128 +3379,6 @@
                 </a:solidFill>
                 <a:latin typeface="Arial"/>
               </a:rPr>
-              <a:t>Verzahnung</a:t>
-            </a:r>
-            <a:br>
-              <a:rPr lang="de-DE" sz="700" b="1" i="0">
-                <a:solidFill>
-                  <a:srgbClr val="1A1A1A"/>
-                </a:solidFill>
-                <a:latin typeface="Arial"/>
-                <a:cs typeface="Arial"/>
-              </a:rPr>
-            </a:br>
-            <a:r>
-              <a:rPr lang="de-DE" sz="700" b="1" i="0">
-                <a:solidFill>
-                  <a:srgbClr val="1A1A1A"/>
-                </a:solidFill>
-                <a:latin typeface="Arial"/>
-              </a:rPr>
-              <a:t>strategischer</a:t>
-            </a:r>
-            <a:br>
-              <a:rPr lang="de-DE" sz="700" b="1" i="0">
-                <a:solidFill>
-                  <a:srgbClr val="1A1A1A"/>
-                </a:solidFill>
-                <a:latin typeface="Arial"/>
-                <a:cs typeface="Arial"/>
-              </a:rPr>
-            </a:br>
-            <a:r>
-              <a:rPr lang="de-DE" sz="700" b="1" i="0">
-                <a:solidFill>
-                  <a:srgbClr val="1A1A1A"/>
-                </a:solidFill>
-                <a:latin typeface="Arial"/>
-              </a:rPr>
-              <a:t>und operativ-</a:t>
-            </a:r>
-            <a:br>
-              <a:rPr lang="de-DE" sz="700" b="1" i="0">
-                <a:solidFill>
-                  <a:srgbClr val="1A1A1A"/>
-                </a:solidFill>
-                <a:latin typeface="Arial"/>
-                <a:cs typeface="Arial"/>
-              </a:rPr>
-            </a:br>
-            <a:r>
-              <a:rPr lang="de-DE" sz="700" b="1" i="0">
-                <a:solidFill>
-                  <a:srgbClr val="1A1A1A"/>
-                </a:solidFill>
-                <a:latin typeface="Arial"/>
-              </a:rPr>
-              <a:t>taktischer</a:t>
-            </a:r>
-            <a:br>
-              <a:rPr lang="de-DE" sz="700" b="1" i="0">
-                <a:solidFill>
-                  <a:srgbClr val="1A1A1A"/>
-                </a:solidFill>
-                <a:latin typeface="Arial"/>
-                <a:cs typeface="Arial"/>
-              </a:rPr>
-            </a:br>
-            <a:r>
-              <a:rPr lang="de-DE" sz="700" b="1" i="0">
-                <a:solidFill>
-                  <a:srgbClr val="1A1A1A"/>
-                </a:solidFill>
-                <a:latin typeface="Arial"/>
-              </a:rPr>
-              <a:t>Planung</a:t>
-            </a:r>
-          </a:p>
-        </p:txBody>
-      </p:sp>
-      <p:sp>
-        <p:nvSpPr>
-          <p:cNvPr id="4" name="Ebene Simulative Planung"/>
-          <p:cNvSpPr/>
-          <p:nvPr/>
-        </p:nvSpPr>
-        <p:spPr>
-          <a:xfrm>
-            <a:off x="10800" y="2304000"/>
-            <a:ext cx="828000" cy="720000"/>
-          </a:xfrm>
-          <a:prstGeom prst="roundRect">
-            <a:avLst>
-              <a:gd name="adj" fmla="val 4000"/>
-            </a:avLst>
-          </a:prstGeom>
-          <a:solidFill>
-            <a:srgbClr val="CFCFCF"/>
-          </a:solidFill>
-          <a:ln w="6350">
-            <a:solidFill>
-              <a:srgbClr val="8A8A8A"/>
-            </a:solidFill>
-            <a:round/>
-          </a:ln>
-        </p:spPr>
-        <p:txBody>
-          <a:bodyPr rtlCol="0" anchor="ctr" lIns="32400" rIns="32400" tIns="21600" bIns="21600" wrap="square">
-            <a:noAutofit/>
-          </a:bodyPr>
-          <a:lstStyle/>
-          <a:p>
-            <a:pPr algn="ctr">
-              <a:lnSpc>
-                <a:spcPts val="826"/>
-              </a:lnSpc>
-              <a:buNone/>
-            </a:pPr>
-            <a:r>
-              <a:rPr lang="de-DE" sz="700" b="1" i="0">
-                <a:solidFill>
-                  <a:srgbClr val="1A1A1A"/>
-                </a:solidFill>
-                <a:latin typeface="Arial"/>
-              </a:rPr>
               <a:t>Simulative</a:t>
             </a:r>
             <a:br>
@@ -3466,8 +3466,8 @@
         </p:nvSpPr>
         <p:spPr>
           <a:xfrm>
-            <a:off x="424800" y="586800"/>
-            <a:ext cx="0" cy="421200"/>
+            <a:off x="424800" y="802800"/>
+            <a:ext cx="0" cy="205200"/>
           </a:xfrm>
           <a:custGeom>
             <a:avLst/>
@@ -3476,12 +3476,12 @@
             <a:cxnLst/>
             <a:rect l="l" t="t" r="r" b="b"/>
             <a:pathLst>
-              <a:path w="0" h="421200">
+              <a:path w="0" h="205200">
                 <a:moveTo>
                   <a:pt x="0" y="0"/>
                 </a:moveTo>
                 <a:lnTo>
-                  <a:pt x="0" y="421200"/>
+                  <a:pt x="0" y="205200"/>
                 </a:lnTo>
               </a:path>
             </a:pathLst>
@@ -3512,8 +3512,8 @@
         </p:nvSpPr>
         <p:spPr>
           <a:xfrm>
-            <a:off x="424800" y="1939644"/>
-            <a:ext cx="0" cy="364356"/>
+            <a:off x="424800" y="1800000"/>
+            <a:ext cx="0" cy="504000"/>
           </a:xfrm>
           <a:custGeom>
             <a:avLst/>
@@ -3522,12 +3522,12 @@
             <a:cxnLst/>
             <a:rect l="l" t="t" r="r" b="b"/>
             <a:pathLst>
-              <a:path w="0" h="364356">
+              <a:path w="0" h="504000">
                 <a:moveTo>
                   <a:pt x="0" y="0"/>
                 </a:moveTo>
                 <a:lnTo>
-                  <a:pt x="0" y="364356"/>
+                  <a:pt x="0" y="504000"/>
                 </a:lnTo>
               </a:path>
             </a:pathLst>
@@ -3558,8 +3558,8 @@
         </p:nvSpPr>
         <p:spPr>
           <a:xfrm>
-            <a:off x="936000" y="10800"/>
-            <a:ext cx="3258000" cy="230400"/>
+            <a:off x="1170000" y="10800"/>
+            <a:ext cx="3240000" cy="230400"/>
           </a:xfrm>
           <a:prstGeom prst="rect">
             <a:avLst/>
@@ -4587,11 +4587,11 @@
         <p:spPr>
           <a:xfrm>
             <a:off x="936000" y="1008000"/>
-            <a:ext cx="1116000" cy="931644"/>
+            <a:ext cx="1116000" cy="792000"/>
           </a:xfrm>
           <a:prstGeom prst="roundRect">
             <a:avLst>
-              <a:gd name="adj" fmla="val 3091"/>
+              <a:gd name="adj" fmla="val 3636"/>
             </a:avLst>
           </a:prstGeom>
           <a:solidFill>
@@ -4667,7 +4667,7 @@
         <p:spPr>
           <a:xfrm>
             <a:off x="936000" y="1188000"/>
-            <a:ext cx="1116000" cy="751644"/>
+            <a:ext cx="1116000" cy="612000"/>
           </a:xfrm>
           <a:prstGeom prst="rect">
             <a:avLst/>
@@ -4682,12 +4682,12 @@
           <a:p>
             <a:pPr algn="l">
               <a:lnSpc>
-                <a:spcPts val="767"/>
+                <a:spcPts val="637"/>
               </a:lnSpc>
               <a:buNone/>
             </a:pPr>
             <a:r>
-              <a:rPr lang="de-DE" sz="650" b="0" i="0">
+              <a:rPr lang="de-DE" sz="540" b="0" i="0">
                 <a:solidFill>
                   <a:srgbClr val="1A1A1A"/>
                 </a:solidFill>
@@ -4699,13 +4699,13 @@
           <a:p>
             <a:pPr algn="l" marL="79200" indent="-79200">
               <a:lnSpc>
-                <a:spcPts val="767"/>
+                <a:spcPts val="637"/>
               </a:lnSpc>
               <a:buFont typeface="Arial"/>
               <a:buChar char="–"/>
             </a:pPr>
             <a:r>
-              <a:rPr lang="de-DE" sz="650" b="0" i="0">
+              <a:rPr lang="de-DE" sz="540" b="0" i="0">
                 <a:solidFill>
                   <a:srgbClr val="1A1A1A"/>
                 </a:solidFill>
@@ -4717,13 +4717,13 @@
           <a:p>
             <a:pPr algn="l" marL="79200" indent="-79200">
               <a:lnSpc>
-                <a:spcPts val="767"/>
+                <a:spcPts val="637"/>
               </a:lnSpc>
               <a:buFont typeface="Arial"/>
               <a:buChar char="–"/>
             </a:pPr>
             <a:r>
-              <a:rPr lang="de-DE" sz="650" b="0" i="0">
+              <a:rPr lang="de-DE" sz="540" b="0" i="0">
                 <a:solidFill>
                   <a:srgbClr val="1A1A1A"/>
                 </a:solidFill>
@@ -4735,19 +4735,37 @@
           <a:p>
             <a:pPr algn="l" marL="79200" indent="-79200">
               <a:lnSpc>
-                <a:spcPts val="767"/>
+                <a:spcPts val="637"/>
               </a:lnSpc>
               <a:buFont typeface="Arial"/>
               <a:buChar char="–"/>
             </a:pPr>
             <a:r>
-              <a:rPr lang="de-DE" sz="650" b="0" i="0">
+              <a:rPr lang="de-DE" sz="540" b="0" i="0">
                 <a:solidFill>
                   <a:srgbClr val="1A1A1A"/>
                 </a:solidFill>
                 <a:latin typeface="Arial"/>
               </a:rPr>
               <a:t>Kennzahlen</a:t>
+            </a:r>
+          </a:p>
+          <a:p>
+            <a:pPr algn="l" marL="79200" indent="-79200">
+              <a:lnSpc>
+                <a:spcPts val="637"/>
+              </a:lnSpc>
+              <a:buFont typeface="Arial"/>
+              <a:buChar char="–"/>
+            </a:pPr>
+            <a:r>
+              <a:rPr lang="de-DE" sz="540" b="0" i="0">
+                <a:solidFill>
+                  <a:srgbClr val="1A1A1A"/>
+                </a:solidFill>
+                <a:latin typeface="Arial"/>
+              </a:rPr>
+              <a:t>Zielerreichung</a:t>
             </a:r>
           </a:p>
         </p:txBody>
@@ -4811,11 +4829,11 @@
         <p:spPr>
           <a:xfrm>
             <a:off x="4302000" y="1008000"/>
-            <a:ext cx="1267200" cy="931644"/>
+            <a:ext cx="1267200" cy="792000"/>
           </a:xfrm>
           <a:prstGeom prst="roundRect">
             <a:avLst>
-              <a:gd name="adj" fmla="val 3091"/>
+              <a:gd name="adj" fmla="val 3636"/>
             </a:avLst>
           </a:prstGeom>
           <a:solidFill>
@@ -4909,7 +4927,7 @@
         <p:spPr>
           <a:xfrm>
             <a:off x="4302000" y="1268790"/>
-            <a:ext cx="1267200" cy="670854"/>
+            <a:ext cx="1267200" cy="531210"/>
           </a:xfrm>
           <a:prstGeom prst="rect">
             <a:avLst/>
@@ -4924,48 +4942,30 @@
           <a:p>
             <a:pPr algn="l">
               <a:lnSpc>
-                <a:spcPts val="767"/>
+                <a:spcPts val="637"/>
               </a:lnSpc>
               <a:buNone/>
             </a:pPr>
             <a:r>
-              <a:rPr lang="de-DE" sz="650" b="0" i="0">
+              <a:rPr lang="de-DE" sz="540" b="0" i="0">
                 <a:solidFill>
                   <a:srgbClr val="1A1A1A"/>
                 </a:solidFill>
                 <a:latin typeface="Arial"/>
               </a:rPr>
-              <a:t>Strategischem Ziel je</a:t>
-            </a:r>
-            <a:br>
-              <a:rPr lang="de-DE" sz="650" b="0" i="0">
-                <a:solidFill>
-                  <a:srgbClr val="1A1A1A"/>
-                </a:solidFill>
-                <a:latin typeface="Arial"/>
-                <a:cs typeface="Arial"/>
-              </a:rPr>
-            </a:br>
-            <a:r>
-              <a:rPr lang="de-DE" sz="650" b="0" i="0">
-                <a:solidFill>
-                  <a:srgbClr val="1A1A1A"/>
-                </a:solidFill>
-                <a:latin typeface="Arial"/>
-              </a:rPr>
-              <a:t>Perspektive:</a:t>
+              <a:t>Strategischem Ziel je Perspektive:</a:t>
             </a:r>
           </a:p>
           <a:p>
             <a:pPr algn="l" marL="79200" indent="-79200">
               <a:lnSpc>
-                <a:spcPts val="767"/>
+                <a:spcPts val="637"/>
               </a:lnSpc>
               <a:buFont typeface="Arial"/>
               <a:buChar char="–"/>
             </a:pPr>
             <a:r>
-              <a:rPr lang="de-DE" sz="650" b="0" i="0">
+              <a:rPr lang="de-DE" sz="540" b="0" i="0">
                 <a:solidFill>
                   <a:srgbClr val="1A1A1A"/>
                 </a:solidFill>
@@ -4977,13 +4977,13 @@
           <a:p>
             <a:pPr algn="l" marL="79200" indent="-79200">
               <a:lnSpc>
-                <a:spcPts val="767"/>
+                <a:spcPts val="637"/>
               </a:lnSpc>
               <a:buFont typeface="Arial"/>
               <a:buChar char="–"/>
             </a:pPr>
             <a:r>
-              <a:rPr lang="de-DE" sz="650" b="0" i="0">
+              <a:rPr lang="de-DE" sz="540" b="0" i="0">
                 <a:solidFill>
                   <a:srgbClr val="1A1A1A"/>
                 </a:solidFill>
@@ -4995,13 +4995,13 @@
           <a:p>
             <a:pPr algn="l" marL="79200" indent="-79200">
               <a:lnSpc>
-                <a:spcPts val="767"/>
+                <a:spcPts val="637"/>
               </a:lnSpc>
               <a:buFont typeface="Arial"/>
               <a:buChar char="–"/>
             </a:pPr>
             <a:r>
-              <a:rPr lang="de-DE" sz="650" b="0" i="0">
+              <a:rPr lang="de-DE" sz="540" b="0" i="0">
                 <a:solidFill>
                   <a:srgbClr val="1A1A1A"/>
                 </a:solidFill>
@@ -5013,13 +5013,13 @@
           <a:p>
             <a:pPr algn="l" marL="79200" indent="-79200">
               <a:lnSpc>
-                <a:spcPts val="767"/>
+                <a:spcPts val="637"/>
               </a:lnSpc>
               <a:buFont typeface="Arial"/>
               <a:buChar char="–"/>
             </a:pPr>
             <a:r>
-              <a:rPr lang="de-DE" sz="650" b="0" i="0">
+              <a:rPr lang="de-DE" sz="540" b="0" i="0">
                 <a:solidFill>
                   <a:srgbClr val="1A1A1A"/>
                 </a:solidFill>
@@ -5084,7 +5084,7 @@
         </p:nvSpPr>
         <p:spPr>
           <a:xfrm>
-            <a:off x="2160000" y="2047644"/>
+            <a:off x="2160000" y="1908000"/>
             <a:ext cx="1965600" cy="1360800"/>
           </a:xfrm>
           <a:prstGeom prst="roundRect">
@@ -5115,7 +5115,7 @@
         </p:nvSpPr>
         <p:spPr>
           <a:xfrm>
-            <a:off x="2250000" y="2119644"/>
+            <a:off x="2250000" y="1980000"/>
             <a:ext cx="633600" cy="151200"/>
           </a:xfrm>
           <a:prstGeom prst="roundRect">
@@ -5165,7 +5165,7 @@
         </p:nvSpPr>
         <p:spPr>
           <a:xfrm>
-            <a:off x="2250000" y="2386044"/>
+            <a:off x="2250000" y="2246400"/>
             <a:ext cx="633600" cy="151200"/>
           </a:xfrm>
           <a:prstGeom prst="roundRect">
@@ -5215,7 +5215,7 @@
         </p:nvSpPr>
         <p:spPr>
           <a:xfrm>
-            <a:off x="2250000" y="2652444"/>
+            <a:off x="2250000" y="2512800"/>
             <a:ext cx="633600" cy="151200"/>
           </a:xfrm>
           <a:prstGeom prst="roundRect">
@@ -5265,7 +5265,7 @@
         </p:nvSpPr>
         <p:spPr>
           <a:xfrm>
-            <a:off x="2250000" y="2918844"/>
+            <a:off x="2250000" y="2779200"/>
             <a:ext cx="633600" cy="151200"/>
           </a:xfrm>
           <a:prstGeom prst="roundRect">
@@ -5315,7 +5315,7 @@
         </p:nvSpPr>
         <p:spPr>
           <a:xfrm>
-            <a:off x="2250000" y="3185244"/>
+            <a:off x="2250000" y="3045600"/>
             <a:ext cx="633600" cy="151200"/>
           </a:xfrm>
           <a:prstGeom prst="roundRect">
@@ -5365,7 +5365,7 @@
         </p:nvSpPr>
         <p:spPr>
           <a:xfrm>
-            <a:off x="3009600" y="2386044"/>
+            <a:off x="3009600" y="2246400"/>
             <a:ext cx="525600" cy="151200"/>
           </a:xfrm>
           <a:prstGeom prst="roundRect">
@@ -5415,7 +5415,7 @@
         </p:nvSpPr>
         <p:spPr>
           <a:xfrm>
-            <a:off x="3625200" y="2688444"/>
+            <a:off x="3625200" y="2548800"/>
             <a:ext cx="446400" cy="151200"/>
           </a:xfrm>
           <a:prstGeom prst="roundRect">
@@ -5465,7 +5465,7 @@
         </p:nvSpPr>
         <p:spPr>
           <a:xfrm>
-            <a:off x="2566800" y="2270844"/>
+            <a:off x="2566800" y="2131200"/>
             <a:ext cx="0" cy="115200"/>
           </a:xfrm>
           <a:custGeom>
@@ -5511,7 +5511,7 @@
         </p:nvSpPr>
         <p:spPr>
           <a:xfrm>
-            <a:off x="2566800" y="2803644"/>
+            <a:off x="2566800" y="2664000"/>
             <a:ext cx="0" cy="115200"/>
           </a:xfrm>
           <a:custGeom>
@@ -5557,7 +5557,7 @@
         </p:nvSpPr>
         <p:spPr>
           <a:xfrm>
-            <a:off x="2566800" y="3070044"/>
+            <a:off x="2566800" y="2930400"/>
             <a:ext cx="0" cy="115200"/>
           </a:xfrm>
           <a:custGeom>
@@ -5603,7 +5603,7 @@
         </p:nvSpPr>
         <p:spPr>
           <a:xfrm>
-            <a:off x="2203200" y="2195244"/>
+            <a:off x="2203200" y="2055600"/>
             <a:ext cx="46800" cy="532800"/>
           </a:xfrm>
           <a:custGeom>
@@ -5654,7 +5654,7 @@
         </p:nvSpPr>
         <p:spPr>
           <a:xfrm>
-            <a:off x="2883600" y="2461644"/>
+            <a:off x="2883600" y="2322000"/>
             <a:ext cx="126000" cy="0"/>
           </a:xfrm>
           <a:custGeom>
@@ -5699,7 +5699,7 @@
         </p:nvSpPr>
         <p:spPr>
           <a:xfrm>
-            <a:off x="2883600" y="2537244"/>
+            <a:off x="2883600" y="2397600"/>
             <a:ext cx="280800" cy="154800"/>
           </a:xfrm>
           <a:custGeom>
@@ -5747,7 +5747,7 @@
         </p:nvSpPr>
         <p:spPr>
           <a:xfrm>
-            <a:off x="2883600" y="2764044"/>
+            <a:off x="2883600" y="2624400"/>
             <a:ext cx="741600" cy="0"/>
           </a:xfrm>
           <a:custGeom>
@@ -5792,7 +5792,7 @@
         </p:nvSpPr>
         <p:spPr>
           <a:xfrm>
-            <a:off x="2883600" y="2537244"/>
+            <a:off x="2883600" y="2397600"/>
             <a:ext cx="496800" cy="723600"/>
           </a:xfrm>
           <a:custGeom>
@@ -5840,7 +5840,7 @@
         </p:nvSpPr>
         <p:spPr>
           <a:xfrm>
-            <a:off x="3535200" y="2461644"/>
+            <a:off x="3535200" y="2322000"/>
             <a:ext cx="313200" cy="226800"/>
           </a:xfrm>
           <a:custGeom>
@@ -6236,7 +6236,7 @@
         </p:nvSpPr>
         <p:spPr>
           <a:xfrm>
-            <a:off x="2052000" y="1831644"/>
+            <a:off x="2052000" y="1692000"/>
             <a:ext cx="2250000" cy="0"/>
           </a:xfrm>
           <a:custGeom>
@@ -6282,7 +6282,7 @@
         </p:nvSpPr>
         <p:spPr>
           <a:xfrm>
-            <a:off x="1296000" y="1939644"/>
+            <a:off x="1296000" y="1800000"/>
             <a:ext cx="864000" cy="1252800"/>
           </a:xfrm>
           <a:custGeom>
@@ -6330,7 +6330,7 @@
         </p:nvSpPr>
         <p:spPr>
           <a:xfrm>
-            <a:off x="1317600" y="2544444"/>
+            <a:off x="1317600" y="2404800"/>
             <a:ext cx="828000" cy="630000"/>
           </a:xfrm>
           <a:prstGeom prst="rect">
@@ -6424,7 +6424,7 @@
         </p:nvSpPr>
         <p:spPr>
           <a:xfrm>
-            <a:off x="4125600" y="1939644"/>
+            <a:off x="4125600" y="1800000"/>
             <a:ext cx="320400" cy="288000"/>
           </a:xfrm>
           <a:custGeom>
@@ -6472,7 +6472,7 @@
         </p:nvSpPr>
         <p:spPr>
           <a:xfrm>
-            <a:off x="4482000" y="1957644"/>
+            <a:off x="4482000" y="1818000"/>
             <a:ext cx="612000" cy="252000"/>
           </a:xfrm>
           <a:prstGeom prst="rect">
@@ -6512,7 +6512,7 @@
         </p:nvSpPr>
         <p:spPr>
           <a:xfrm>
-            <a:off x="4125600" y="1939644"/>
+            <a:off x="4125600" y="1800000"/>
             <a:ext cx="968400" cy="1360800"/>
           </a:xfrm>
           <a:custGeom>
@@ -6560,7 +6560,7 @@
         </p:nvSpPr>
         <p:spPr>
           <a:xfrm>
-            <a:off x="4161600" y="3070044"/>
+            <a:off x="4161600" y="2930400"/>
             <a:ext cx="918000" cy="223200"/>
           </a:xfrm>
           <a:prstGeom prst="rect">

--- a/abbildungen/kap3/Gesamtmodellueberblick_fuer_die_integrierte_Unternehmensplanung_und_-steuerung.pptx
+++ b/abbildungen/kap3/Gesamtmodellueberblick_fuer_die_integrierte_Unternehmensplanung_und_-steuerung.pptx
@@ -4953,7 +4953,7 @@
                 </a:solidFill>
                 <a:latin typeface="Arial"/>
               </a:rPr>
-              <a:t>Strategischem Ziel je Perspektive:</a:t>
+              <a:t>Strategische Ziele je Perspektive:</a:t>
             </a:r>
           </a:p>
           <a:p>
@@ -5084,7 +5084,7 @@
         </p:nvSpPr>
         <p:spPr>
           <a:xfrm>
-            <a:off x="2160000" y="1908000"/>
+            <a:off x="2160000" y="2120400"/>
             <a:ext cx="1965600" cy="1360800"/>
           </a:xfrm>
           <a:prstGeom prst="roundRect">
@@ -5115,7 +5115,7 @@
         </p:nvSpPr>
         <p:spPr>
           <a:xfrm>
-            <a:off x="2250000" y="1980000"/>
+            <a:off x="2250000" y="2192400"/>
             <a:ext cx="633600" cy="151200"/>
           </a:xfrm>
           <a:prstGeom prst="roundRect">
@@ -5165,7 +5165,7 @@
         </p:nvSpPr>
         <p:spPr>
           <a:xfrm>
-            <a:off x="2250000" y="2246400"/>
+            <a:off x="2250000" y="2458800"/>
             <a:ext cx="633600" cy="151200"/>
           </a:xfrm>
           <a:prstGeom prst="roundRect">
@@ -5215,7 +5215,7 @@
         </p:nvSpPr>
         <p:spPr>
           <a:xfrm>
-            <a:off x="2250000" y="2512800"/>
+            <a:off x="2250000" y="2725200"/>
             <a:ext cx="633600" cy="151200"/>
           </a:xfrm>
           <a:prstGeom prst="roundRect">
@@ -5265,7 +5265,7 @@
         </p:nvSpPr>
         <p:spPr>
           <a:xfrm>
-            <a:off x="2250000" y="2779200"/>
+            <a:off x="2250000" y="2991600"/>
             <a:ext cx="633600" cy="151200"/>
           </a:xfrm>
           <a:prstGeom prst="roundRect">
@@ -5315,7 +5315,7 @@
         </p:nvSpPr>
         <p:spPr>
           <a:xfrm>
-            <a:off x="2250000" y="3045600"/>
+            <a:off x="2250000" y="3258000"/>
             <a:ext cx="633600" cy="151200"/>
           </a:xfrm>
           <a:prstGeom prst="roundRect">
@@ -5365,7 +5365,7 @@
         </p:nvSpPr>
         <p:spPr>
           <a:xfrm>
-            <a:off x="3009600" y="2246400"/>
+            <a:off x="3009600" y="2458800"/>
             <a:ext cx="525600" cy="151200"/>
           </a:xfrm>
           <a:prstGeom prst="roundRect">
@@ -5415,7 +5415,7 @@
         </p:nvSpPr>
         <p:spPr>
           <a:xfrm>
-            <a:off x="3625200" y="2548800"/>
+            <a:off x="3625200" y="2761200"/>
             <a:ext cx="446400" cy="151200"/>
           </a:xfrm>
           <a:prstGeom prst="roundRect">
@@ -5465,7 +5465,7 @@
         </p:nvSpPr>
         <p:spPr>
           <a:xfrm>
-            <a:off x="2566800" y="2131200"/>
+            <a:off x="2566800" y="2343600"/>
             <a:ext cx="0" cy="115200"/>
           </a:xfrm>
           <a:custGeom>
@@ -5511,7 +5511,7 @@
         </p:nvSpPr>
         <p:spPr>
           <a:xfrm>
-            <a:off x="2566800" y="2664000"/>
+            <a:off x="2566800" y="2876400"/>
             <a:ext cx="0" cy="115200"/>
           </a:xfrm>
           <a:custGeom>
@@ -5557,7 +5557,7 @@
         </p:nvSpPr>
         <p:spPr>
           <a:xfrm>
-            <a:off x="2566800" y="2930400"/>
+            <a:off x="2566800" y="3142800"/>
             <a:ext cx="0" cy="115200"/>
           </a:xfrm>
           <a:custGeom>
@@ -5603,7 +5603,7 @@
         </p:nvSpPr>
         <p:spPr>
           <a:xfrm>
-            <a:off x="2203200" y="2055600"/>
+            <a:off x="2203200" y="2268000"/>
             <a:ext cx="46800" cy="532800"/>
           </a:xfrm>
           <a:custGeom>
@@ -5654,7 +5654,7 @@
         </p:nvSpPr>
         <p:spPr>
           <a:xfrm>
-            <a:off x="2883600" y="2322000"/>
+            <a:off x="2883600" y="2534400"/>
             <a:ext cx="126000" cy="0"/>
           </a:xfrm>
           <a:custGeom>
@@ -5699,7 +5699,7 @@
         </p:nvSpPr>
         <p:spPr>
           <a:xfrm>
-            <a:off x="2883600" y="2397600"/>
+            <a:off x="2883600" y="2610000"/>
             <a:ext cx="280800" cy="154800"/>
           </a:xfrm>
           <a:custGeom>
@@ -5747,7 +5747,7 @@
         </p:nvSpPr>
         <p:spPr>
           <a:xfrm>
-            <a:off x="2883600" y="2624400"/>
+            <a:off x="2883600" y="2836800"/>
             <a:ext cx="741600" cy="0"/>
           </a:xfrm>
           <a:custGeom>
@@ -5792,7 +5792,7 @@
         </p:nvSpPr>
         <p:spPr>
           <a:xfrm>
-            <a:off x="2883600" y="2397600"/>
+            <a:off x="2883600" y="2610000"/>
             <a:ext cx="496800" cy="723600"/>
           </a:xfrm>
           <a:custGeom>
@@ -5840,7 +5840,7 @@
         </p:nvSpPr>
         <p:spPr>
           <a:xfrm>
-            <a:off x="3535200" y="2322000"/>
+            <a:off x="3535200" y="2534400"/>
             <a:ext cx="313200" cy="226800"/>
           </a:xfrm>
           <a:custGeom>
@@ -6283,7 +6283,7 @@
         <p:spPr>
           <a:xfrm>
             <a:off x="1296000" y="1800000"/>
-            <a:ext cx="864000" cy="1252800"/>
+            <a:ext cx="864000" cy="1465200"/>
           </a:xfrm>
           <a:custGeom>
             <a:avLst/>
@@ -6292,15 +6292,15 @@
             <a:cxnLst/>
             <a:rect l="l" t="t" r="r" b="b"/>
             <a:pathLst>
-              <a:path w="864000" h="1252800">
+              <a:path w="864000" h="1465200">
                 <a:moveTo>
                   <a:pt x="0" y="0"/>
                 </a:moveTo>
                 <a:lnTo>
-                  <a:pt x="0" y="1252800"/>
+                  <a:pt x="0" y="1465200"/>
                 </a:lnTo>
                 <a:lnTo>
-                  <a:pt x="864000" y="1252800"/>
+                  <a:pt x="864000" y="1465200"/>
                 </a:lnTo>
               </a:path>
             </a:pathLst>
@@ -6330,7 +6330,7 @@
         </p:nvSpPr>
         <p:spPr>
           <a:xfrm>
-            <a:off x="1317600" y="2404800"/>
+            <a:off x="1317600" y="2617200"/>
             <a:ext cx="828000" cy="630000"/>
           </a:xfrm>
           <a:prstGeom prst="rect">
@@ -6425,7 +6425,7 @@
         <p:spPr>
           <a:xfrm>
             <a:off x="4125600" y="1800000"/>
-            <a:ext cx="320400" cy="288000"/>
+            <a:ext cx="320400" cy="500400"/>
           </a:xfrm>
           <a:custGeom>
             <a:avLst/>
@@ -6434,15 +6434,15 @@
             <a:cxnLst/>
             <a:rect l="l" t="t" r="r" b="b"/>
             <a:pathLst>
-              <a:path w="320400" h="288000">
+              <a:path w="320400" h="500400">
                 <a:moveTo>
                   <a:pt x="320400" y="0"/>
                 </a:moveTo>
                 <a:lnTo>
-                  <a:pt x="320400" y="288000"/>
+                  <a:pt x="320400" y="500400"/>
                 </a:lnTo>
                 <a:lnTo>
-                  <a:pt x="0" y="288000"/>
+                  <a:pt x="0" y="500400"/>
                 </a:lnTo>
               </a:path>
             </a:pathLst>
@@ -6473,7 +6473,7 @@
         <p:spPr>
           <a:xfrm>
             <a:off x="4482000" y="1818000"/>
-            <a:ext cx="612000" cy="252000"/>
+            <a:ext cx="612000" cy="464400"/>
           </a:xfrm>
           <a:prstGeom prst="rect">
             <a:avLst/>
@@ -6513,7 +6513,7 @@
         <p:spPr>
           <a:xfrm>
             <a:off x="4125600" y="1800000"/>
-            <a:ext cx="968400" cy="1360800"/>
+            <a:ext cx="968400" cy="1573200"/>
           </a:xfrm>
           <a:custGeom>
             <a:avLst/>
@@ -6522,12 +6522,12 @@
             <a:cxnLst/>
             <a:rect l="l" t="t" r="r" b="b"/>
             <a:pathLst>
-              <a:path w="968400" h="1360800">
+              <a:path w="968400" h="1573200">
                 <a:moveTo>
-                  <a:pt x="0" y="1360800"/>
+                  <a:pt x="0" y="1573200"/>
                 </a:moveTo>
                 <a:lnTo>
-                  <a:pt x="968400" y="1360800"/>
+                  <a:pt x="968400" y="1573200"/>
                 </a:lnTo>
                 <a:lnTo>
                   <a:pt x="968400" y="0"/>
@@ -6560,7 +6560,7 @@
         </p:nvSpPr>
         <p:spPr>
           <a:xfrm>
-            <a:off x="4161600" y="2930400"/>
+            <a:off x="4161600" y="3142800"/>
             <a:ext cx="918000" cy="223200"/>
           </a:xfrm>
           <a:prstGeom prst="rect">
